--- a/nedp_deck/Slide12_Market_Review_Style.pptx
+++ b/nedp_deck/Slide12_Market_Review_Style.pptx
@@ -1023,7 +1023,7 @@
                           <a:srgbClr val="000000"/>
                         </a:solidFill>
                       </a:rPr>
-                      <a:t>$3,02 M</a:t>
+                      <a:t>Rp 48,3 Bio</a:t>
                     </a:r>
                   </a:p>
                   <a:p>
@@ -1075,7 +1075,7 @@
                 </c:pt>
                 <c:pt idx="1">
                   <c:v>Value
-(= $21,07 M)</c:v>
+(= Rp 337,2 Bio)</c:v>
                 </c:pt>
               </c:strCache>
             </c:strRef>
@@ -1090,7 +1090,7 @@
                   <c:v>248</c:v>
                 </c:pt>
                 <c:pt idx="1">
-                  <c:v>3.019087</c:v>
+                  <c:v>48.305392</c:v>
                 </c:pt>
               </c:numCache>
             </c:numRef>
@@ -1169,7 +1169,7 @@
                           <a:srgbClr val="000000"/>
                         </a:solidFill>
                       </a:rPr>
-                      <a:t>$5,04 M</a:t>
+                      <a:t>Rp 80,6 Bio</a:t>
                     </a:r>
                   </a:p>
                   <a:p>
@@ -1221,7 +1221,7 @@
                 </c:pt>
                 <c:pt idx="1">
                   <c:v>Value
-(= $21,07 M)</c:v>
+(= Rp 337,2 Bio)</c:v>
                 </c:pt>
               </c:strCache>
             </c:strRef>
@@ -1236,7 +1236,7 @@
                   <c:v>223</c:v>
                 </c:pt>
                 <c:pt idx="1">
-                  <c:v>5.037297</c:v>
+                  <c:v>80.596752</c:v>
                 </c:pt>
               </c:numCache>
             </c:numRef>
@@ -1315,7 +1315,7 @@
                           <a:srgbClr val="FFFFFF"/>
                         </a:solidFill>
                       </a:rPr>
-                      <a:t>$7,30 M</a:t>
+                      <a:t>Rp 116,9 Bio</a:t>
                     </a:r>
                   </a:p>
                   <a:p>
@@ -1367,7 +1367,7 @@
                 </c:pt>
                 <c:pt idx="1">
                   <c:v>Value
-(= $21,07 M)</c:v>
+(= Rp 337,2 Bio)</c:v>
                 </c:pt>
               </c:strCache>
             </c:strRef>
@@ -1382,7 +1382,7 @@
                   <c:v>218</c:v>
                 </c:pt>
                 <c:pt idx="1">
-                  <c:v>7.304431</c:v>
+                  <c:v>116.870896</c:v>
                 </c:pt>
               </c:numCache>
             </c:numRef>
@@ -1461,7 +1461,7 @@
                           <a:srgbClr val="FFFFFF"/>
                         </a:solidFill>
                       </a:rPr>
-                      <a:t>$5,71 M</a:t>
+                      <a:t>Rp 91,4 Bio</a:t>
                     </a:r>
                   </a:p>
                   <a:p>
@@ -1513,7 +1513,7 @@
                 </c:pt>
                 <c:pt idx="1">
                   <c:v>Value
-(= $21,07 M)</c:v>
+(= Rp 337,2 Bio)</c:v>
                 </c:pt>
               </c:strCache>
             </c:strRef>
@@ -1528,13 +1528,13 @@
                   <c:v>75</c:v>
                 </c:pt>
                 <c:pt idx="1">
-                  <c:v>5.712582</c:v>
+                  <c:v>91.401312</c:v>
                 </c:pt>
               </c:numCache>
             </c:numRef>
           </c:val>
         </c:ser>
-        <c:gapWidth val="70"/>
+        <c:gapWidth val="35"/>
         <c:overlap val="100"/>
         <c:serLines>
           <c:spPr>
@@ -4927,7 +4927,7 @@
                 </a:solidFill>
                 <a:latin typeface="Neue Haas Grotesk Text Pro"/>
               </a:rPr>
-              <a:t>62% ($13,02 M out of $21,07 M)</a:t>
+              <a:t>62% (Rp 208,3 Bio out of Rp 337,2 Bio)</a:t>
             </a:r>
             <a:r>
               <a:rPr sz="1400" b="0">
@@ -6201,7 +6201,7 @@
         </p:nvCxnSpPr>
         <p:spPr>
           <a:xfrm>
-            <a:off x="9669556" y="5354047"/>
+            <a:off x="9771239" y="5354047"/>
             <a:ext cx="0" cy="376193"/>
           </a:xfrm>
           <a:prstGeom prst="line">
@@ -6236,7 +6236,7 @@
         </p:nvCxnSpPr>
         <p:spPr>
           <a:xfrm flipH="1">
-            <a:off x="9612406" y="5354047"/>
+            <a:off x="9714089" y="5354047"/>
             <a:ext cx="57150" cy="0"/>
           </a:xfrm>
           <a:prstGeom prst="line">
@@ -6271,7 +6271,7 @@
         </p:nvCxnSpPr>
         <p:spPr>
           <a:xfrm flipH="1">
-            <a:off x="9612406" y="5730240"/>
+            <a:off x="9714089" y="5730240"/>
             <a:ext cx="57150" cy="0"/>
           </a:xfrm>
           <a:prstGeom prst="line">
@@ -6306,7 +6306,7 @@
         </p:nvSpPr>
         <p:spPr>
           <a:xfrm>
-            <a:off x="9745756" y="5389743"/>
+            <a:off x="9847439" y="5389743"/>
             <a:ext cx="1200150" cy="323850"/>
           </a:xfrm>
           <a:prstGeom prst="rect">
@@ -6353,7 +6353,7 @@
         </p:nvCxnSpPr>
         <p:spPr>
           <a:xfrm>
-            <a:off x="9669556" y="4662805"/>
+            <a:off x="9771239" y="4662805"/>
             <a:ext cx="0" cy="653142"/>
           </a:xfrm>
           <a:prstGeom prst="line">
@@ -6388,7 +6388,7 @@
         </p:nvCxnSpPr>
         <p:spPr>
           <a:xfrm flipH="1">
-            <a:off x="9612406" y="4662805"/>
+            <a:off x="9714089" y="4662805"/>
             <a:ext cx="57150" cy="0"/>
           </a:xfrm>
           <a:prstGeom prst="line">
@@ -6423,7 +6423,7 @@
         </p:nvCxnSpPr>
         <p:spPr>
           <a:xfrm flipH="1">
-            <a:off x="9612406" y="5315947"/>
+            <a:off x="9714089" y="5315947"/>
             <a:ext cx="57150" cy="0"/>
           </a:xfrm>
           <a:prstGeom prst="line">
@@ -6458,7 +6458,7 @@
         </p:nvSpPr>
         <p:spPr>
           <a:xfrm>
-            <a:off x="9745756" y="4836976"/>
+            <a:off x="9847439" y="4836976"/>
             <a:ext cx="1200150" cy="323850"/>
           </a:xfrm>
           <a:prstGeom prst="rect">
@@ -6505,7 +6505,7 @@
         </p:nvCxnSpPr>
         <p:spPr>
           <a:xfrm>
-            <a:off x="9669556" y="3660457"/>
+            <a:off x="9771239" y="3660457"/>
             <a:ext cx="0" cy="964248"/>
           </a:xfrm>
           <a:prstGeom prst="line">
@@ -6540,7 +6540,7 @@
         </p:nvCxnSpPr>
         <p:spPr>
           <a:xfrm flipH="1">
-            <a:off x="9612406" y="3660457"/>
+            <a:off x="9714089" y="3660457"/>
             <a:ext cx="57150" cy="0"/>
           </a:xfrm>
           <a:prstGeom prst="line">
@@ -6575,7 +6575,7 @@
         </p:nvCxnSpPr>
         <p:spPr>
           <a:xfrm flipH="1">
-            <a:off x="9612406" y="4624705"/>
+            <a:off x="9714089" y="4624705"/>
             <a:ext cx="57150" cy="0"/>
           </a:xfrm>
           <a:prstGeom prst="line">
@@ -6610,7 +6610,7 @@
         </p:nvSpPr>
         <p:spPr>
           <a:xfrm>
-            <a:off x="9745756" y="3990181"/>
+            <a:off x="9847439" y="3990181"/>
             <a:ext cx="1200150" cy="323850"/>
           </a:xfrm>
           <a:prstGeom prst="rect">
@@ -6657,7 +6657,7 @@
         </p:nvCxnSpPr>
         <p:spPr>
           <a:xfrm>
-            <a:off x="9669556" y="2876550"/>
+            <a:off x="9771239" y="2876550"/>
             <a:ext cx="0" cy="745807"/>
           </a:xfrm>
           <a:prstGeom prst="line">
@@ -6692,7 +6692,7 @@
         </p:nvCxnSpPr>
         <p:spPr>
           <a:xfrm flipH="1">
-            <a:off x="9612406" y="2876550"/>
+            <a:off x="9714089" y="2876550"/>
             <a:ext cx="57150" cy="0"/>
           </a:xfrm>
           <a:prstGeom prst="line">
@@ -6727,7 +6727,7 @@
         </p:nvCxnSpPr>
         <p:spPr>
           <a:xfrm flipH="1">
-            <a:off x="9612406" y="3622357"/>
+            <a:off x="9714089" y="3622357"/>
             <a:ext cx="57150" cy="0"/>
           </a:xfrm>
           <a:prstGeom prst="line">
@@ -6762,7 +6762,7 @@
         </p:nvSpPr>
         <p:spPr>
           <a:xfrm>
-            <a:off x="9745756" y="3097054"/>
+            <a:off x="9847439" y="3097054"/>
             <a:ext cx="1200150" cy="323850"/>
           </a:xfrm>
           <a:prstGeom prst="rect">
@@ -6809,7 +6809,7 @@
         </p:nvCxnSpPr>
         <p:spPr>
           <a:xfrm>
-            <a:off x="7303994" y="2876550"/>
+            <a:off x="7202311" y="2876550"/>
             <a:ext cx="0" cy="1070924"/>
           </a:xfrm>
           <a:prstGeom prst="line">
@@ -6844,7 +6844,7 @@
         </p:nvCxnSpPr>
         <p:spPr>
           <a:xfrm>
-            <a:off x="7303994" y="2876550"/>
+            <a:off x="7202311" y="2876550"/>
             <a:ext cx="57150" cy="0"/>
           </a:xfrm>
           <a:prstGeom prst="line">
@@ -6879,7 +6879,7 @@
         </p:nvCxnSpPr>
         <p:spPr>
           <a:xfrm>
-            <a:off x="7303994" y="3947474"/>
+            <a:off x="7202311" y="3947474"/>
             <a:ext cx="57150" cy="0"/>
           </a:xfrm>
           <a:prstGeom prst="line">
@@ -6915,7 +6915,7 @@
         <p:spPr>
           <a:xfrm>
             <a:off x="6324600" y="3088162"/>
-            <a:ext cx="903194" cy="647700"/>
+            <a:ext cx="801511" cy="647700"/>
           </a:xfrm>
           <a:prstGeom prst="rect">
             <a:avLst/>
@@ -6985,7 +6985,7 @@
         </p:nvCxnSpPr>
         <p:spPr>
           <a:xfrm>
-            <a:off x="10984006" y="2876550"/>
+            <a:off x="11085689" y="2876550"/>
             <a:ext cx="0" cy="1748155"/>
           </a:xfrm>
           <a:prstGeom prst="line">
@@ -7020,7 +7020,7 @@
         </p:nvCxnSpPr>
         <p:spPr>
           <a:xfrm flipH="1">
-            <a:off x="10926856" y="2876550"/>
+            <a:off x="11028539" y="2876550"/>
             <a:ext cx="57150" cy="0"/>
           </a:xfrm>
           <a:prstGeom prst="line">
@@ -7055,7 +7055,7 @@
         </p:nvCxnSpPr>
         <p:spPr>
           <a:xfrm flipH="1">
-            <a:off x="10926856" y="4624705"/>
+            <a:off x="11028539" y="4624705"/>
             <a:ext cx="57150" cy="0"/>
           </a:xfrm>
           <a:prstGeom prst="line">
@@ -7090,8 +7090,8 @@
         </p:nvSpPr>
         <p:spPr>
           <a:xfrm>
-            <a:off x="11060206" y="3464878"/>
-            <a:ext cx="788894" cy="571500"/>
+            <a:off x="11161889" y="3464878"/>
+            <a:ext cx="687211" cy="571500"/>
           </a:xfrm>
           <a:prstGeom prst="rect">
             <a:avLst/>
@@ -7136,7 +7136,7 @@
                 </a:solidFill>
                 <a:latin typeface="Neue Haas Grotesk Text Pro"/>
               </a:rPr>
-              <a:t>$13,02 M</a:t>
+              <a:t>Rp 208,3 Bio</a:t>
             </a:r>
           </a:p>
         </p:txBody>
@@ -7180,7 +7180,7 @@
                 </a:solidFill>
                 <a:latin typeface="Neue Haas Grotesk Text Pro"/>
               </a:rPr>
-              <a:t>Indonesia import records 2023 – Aug 2026, knuckle boom (folding) cranes; value in USD (M = million).</a:t>
+              <a:t>Indonesia import records 2023 – Aug 2026, knuckle boom (folding) cranes; value converted from USD at assumed Rp 16.000/USD (Bio = billion).</a:t>
             </a:r>
           </a:p>
         </p:txBody>
